--- a/10-Knowledge-Products/KP1-GEA/videos/module_5/en/decks/KP1_M5_5.6_Deck_v0.2.pptx
+++ b/10-Knowledge-Products/KP1-GEA/videos/module_5/en/decks/KP1_M5_5.6_Deck_v0.2.pptx
@@ -14,13 +14,13 @@
     <p:handoutMasterId r:id="rId47"/>
   </p:handoutMasterIdLst>
   <p:sldIdLst>
-    <p:sldId id="2681" r:id="rId8"/>
-    <p:sldId id="2730" r:id="rId11"/>
-    <p:sldId id="2731" r:id="rId10"/>
-    <p:sldId id="2732" r:id="rId54"/>
-    <p:sldId id="2733" r:id="rId55"/>
-    <p:sldId id="2734" r:id="rId56"/>
     <p:sldId id="2735" r:id="rId57"/>
+    <p:sldId id="2736" r:id="rId58"/>
+    <p:sldId id="2737" r:id="rId59"/>
+    <p:sldId id="2738" r:id="rId60"/>
+    <p:sldId id="2739" r:id="rId61"/>
+    <p:sldId id="2740" r:id="rId62"/>
+    <p:sldId id="2741" r:id="rId63"/>
   </p:sldIdLst>
   <p:sldSz cx="12192000" cy="6858000"/>
   <p:notesSz cx="6858000" cy="9144000"/>
@@ -887,7 +887,7 @@
 </p:notesMaster>
 </file>
 
-<file path=ppt/notesSlides/notesSlide21.xml><?xml version="1.0" encoding="utf-8"?>
+<file path=ppt/notesSlides/notesSlide42.xml><?xml version="1.0" encoding="utf-8"?>
 <p:notes xmlns:a="http://schemas.openxmlformats.org/drawingml/2006/main" xmlns:p="http://schemas.openxmlformats.org/presentationml/2006/main" xmlns:r="http://schemas.openxmlformats.org/officeDocument/2006/relationships">
   <p:cSld>
     <p:spTree>
@@ -932,7 +932,7 @@
           <a:lstStyle/>
           <a:p>
             <a:r>
-              <a:t>Title card for standalone video 5.6. Content slides are identical to the corresponding section of the combined deck KP1_M5_Deck_v0.2.pptx; voice-over is in each slide’s notes.</a:t>
+              <a:t>Title card — the cold open. The hosts name the module, the video number, the title and the single message on this slide; no scripted narration. Hold until the opener begins; the opener is narrated on the next slide.</a:t>
             </a:r>
           </a:p>
         </p:txBody>
@@ -957,7 +957,7 @@
 </p:notes>
 </file>
 
-<file path=ppt/notesSlides/notesSlide37.xml><?xml version="1.0" encoding="utf-8"?>
+<file path=ppt/notesSlides/notesSlide43.xml><?xml version="1.0" encoding="utf-8"?>
 <p:notes xmlns:a="http://schemas.openxmlformats.org/drawingml/2006/main" xmlns:p="http://schemas.openxmlformats.org/presentationml/2006/main" xmlns:r="http://schemas.openxmlformats.org/officeDocument/2006/relationships">
   <p:cSld>
     <p:spTree>
@@ -1002,7 +1002,7 @@
           <a:lstStyle/>
           <a:p>
             <a:r>
-              <a:t>VO, slide 1: Bring it all together into the case you carry into the room. It reduces to three sentences a minister can hold: this is proven, it is portable, and it is necessary now. Underneath those sit the two reasons an Enterprise Architecture exists at all.</a:t>
+              <a:t>VO: Bring it all together into the case you carry into the room. It reduces to three sentences a minister can hold: this is proven, it is portable, and it is necessary now. Underneath those sit the two reasons an Enterprise Architecture exists at all.</a:t>
             </a:r>
           </a:p>
           <a:p/>
@@ -1033,7 +1033,7 @@
 </p:notes>
 </file>
 
-<file path=ppt/notesSlides/notesSlide38.xml><?xml version="1.0" encoding="utf-8"?>
+<file path=ppt/notesSlides/notesSlide44.xml><?xml version="1.0" encoding="utf-8"?>
 <p:notes xmlns:a="http://schemas.openxmlformats.org/drawingml/2006/main" xmlns:p="http://schemas.openxmlformats.org/presentationml/2006/main" xmlns:r="http://schemas.openxmlformats.org/officeDocument/2006/relationships">
   <p:cSld>
     <p:spTree>
@@ -1103,7 +1103,7 @@
 </p:notes>
 </file>
 
-<file path=ppt/notesSlides/notesSlide39.xml><?xml version="1.0" encoding="utf-8"?>
+<file path=ppt/notesSlides/notesSlide45.xml><?xml version="1.0" encoding="utf-8"?>
 <p:notes xmlns:a="http://schemas.openxmlformats.org/drawingml/2006/main" xmlns:p="http://schemas.openxmlformats.org/presentationml/2006/main" xmlns:r="http://schemas.openxmlformats.org/officeDocument/2006/relationships">
   <p:cSld>
     <p:spTree>
@@ -1179,7 +1179,7 @@
 </p:notes>
 </file>
 
-<file path=ppt/notesSlides/notesSlide40.xml><?xml version="1.0" encoding="utf-8"?>
+<file path=ppt/notesSlides/notesSlide46.xml><?xml version="1.0" encoding="utf-8"?>
 <p:notes xmlns:a="http://schemas.openxmlformats.org/drawingml/2006/main" xmlns:p="http://schemas.openxmlformats.org/presentationml/2006/main" xmlns:r="http://schemas.openxmlformats.org/officeDocument/2006/relationships">
   <p:cSld>
     <p:spTree>
@@ -1255,7 +1255,7 @@
 </p:notes>
 </file>
 
-<file path=ppt/notesSlides/notesSlide41.xml><?xml version="1.0" encoding="utf-8"?>
+<file path=ppt/notesSlides/notesSlide47.xml><?xml version="1.0" encoding="utf-8"?>
 <p:notes xmlns:a="http://schemas.openxmlformats.org/drawingml/2006/main" xmlns:p="http://schemas.openxmlformats.org/presentationml/2006/main" xmlns:r="http://schemas.openxmlformats.org/officeDocument/2006/relationships">
   <p:cSld>
     <p:spTree>
@@ -1331,7 +1331,7 @@
 </p:notes>
 </file>
 
-<file path=ppt/notesSlides/notesSlide42.xml><?xml version="1.0" encoding="utf-8"?>
+<file path=ppt/notesSlides/notesSlide48.xml><?xml version="1.0" encoding="utf-8"?>
 <p:notes xmlns:a="http://schemas.openxmlformats.org/drawingml/2006/main" xmlns:p="http://schemas.openxmlformats.org/presentationml/2006/main" xmlns:r="http://schemas.openxmlformats.org/officeDocument/2006/relationships">
   <p:cSld>
     <p:spTree>
@@ -11537,8 +11537,8 @@
 </p:sldMaster>
 </file>
 
-<file path=ppt/slides/slide1.xml><?xml version="1.0" encoding="utf-8"?>
-<p:sld xmlns:a="http://schemas.openxmlformats.org/drawingml/2006/main" xmlns:r="http://schemas.openxmlformats.org/officeDocument/2006/relationships" xmlns:p="http://schemas.openxmlformats.org/presentationml/2006/main">
+<file path=ppt/slides/slide42.xml><?xml version="1.0" encoding="utf-8"?>
+<p:sld xmlns:a="http://schemas.openxmlformats.org/drawingml/2006/main" xmlns:p="http://schemas.openxmlformats.org/presentationml/2006/main" xmlns:r="http://schemas.openxmlformats.org/officeDocument/2006/relationships">
   <p:cSld>
     <p:spTree>
       <p:nvGrpSpPr>
@@ -11546,222 +11546,133 @@
         <p:cNvGrpSpPr/>
         <p:nvPr/>
       </p:nvGrpSpPr>
-      <p:grpSpPr>
-        <a:xfrm>
-          <a:off x="0" y="0"/>
-          <a:ext cx="0" cy="0"/>
-          <a:chOff x="0" y="0"/>
-          <a:chExt cx="0" cy="0"/>
-        </a:xfrm>
-      </p:grpSpPr>
-      <p:cxnSp>
-        <p:nvCxnSpPr>
-          <p:cNvPr id="11" name="Straight Connector 10">
-            <a:extLst>
-              <a:ext uri="{FF2B5EF4-FFF2-40B4-BE49-F238E27FC236}">
-                <a16:creationId xmlns:a16="http://schemas.microsoft.com/office/drawing/2014/main" id="{D9AD66F2-F7C0-4D03-9150-D28F17AC561D}"/>
-              </a:ext>
-            </a:extLst>
-          </p:cNvPr>
-          <p:cNvCxnSpPr>
-            <a:cxnSpLocks/>
-          </p:cNvCxnSpPr>
+      <p:grpSpPr/>
+      <p:sp>
+        <p:nvSpPr>
+          <p:cNvPr id="2" name="TextBox 1"/>
+          <p:cNvSpPr txBox="1"/>
           <p:nvPr/>
-        </p:nvCxnSpPr>
-        <p:spPr>
-          <a:xfrm>
-            <a:off x="373021" y="2198718"/>
-            <a:ext cx="6843567" cy="0"/>
-          </a:xfrm>
-          <a:prstGeom prst="line">
-            <a:avLst/>
-          </a:prstGeom>
-          <a:ln w="12700">
-            <a:solidFill>
-              <a:srgbClr val="009CD6"/>
-            </a:solidFill>
-          </a:ln>
-        </p:spPr>
-        <p:style>
-          <a:lnRef idx="1">
-            <a:schemeClr val="accent1"/>
-          </a:lnRef>
-          <a:fillRef idx="0">
-            <a:schemeClr val="accent1"/>
-          </a:fillRef>
-          <a:effectRef idx="0">
-            <a:schemeClr val="accent1"/>
-          </a:effectRef>
-          <a:fontRef idx="minor">
-            <a:schemeClr val="tx1"/>
-          </a:fontRef>
-        </p:style>
-      </p:cxnSp>
-      <p:sp>
-        <p:nvSpPr>
-          <p:cNvPr id="12" name="Title 9">
-            <a:extLst>
-              <a:ext uri="{FF2B5EF4-FFF2-40B4-BE49-F238E27FC236}">
-                <a16:creationId xmlns:a16="http://schemas.microsoft.com/office/drawing/2014/main" id="{EEB08032-CE0E-4986-AEDF-A41026C0E8B9}"/>
-              </a:ext>
-            </a:extLst>
-          </p:cNvPr>
-          <p:cNvSpPr txBox="1">
-            <a:spLocks/>
-          </p:cNvSpPr>
-          <p:nvPr/>
-        </p:nvSpPr>
-        <p:spPr>
-          <a:xfrm>
-            <a:off x="237734" y="702833"/>
-            <a:ext cx="6432007" cy="1218817"/>
+        </p:nvSpPr>
+        <p:spPr>
+          <a:xfrm>
+            <a:off x="822960" y="822960"/>
+            <a:ext cx="7315200" cy="457200"/>
           </a:xfrm>
           <a:prstGeom prst="rect">
             <a:avLst/>
           </a:prstGeom>
+          <a:noFill/>
         </p:spPr>
         <p:txBody>
-          <a:bodyPr anchor="b">
-            <a:noAutofit/>
+          <a:bodyPr wrap="square">
+            <a:spAutoFit/>
           </a:bodyPr>
-          <a:lstStyle>
-            <a:lvl1pPr algn="l" defTabSz="914400" rtl="0" eaLnBrk="1" latinLnBrk="0" hangingPunct="1">
-              <a:lnSpc>
-                <a:spcPct val="90000"/>
-              </a:lnSpc>
-              <a:spcBef>
-                <a:spcPct val="0"/>
-              </a:spcBef>
-              <a:buNone/>
-              <a:defRPr sz="4000" kern="1200">
+          <a:lstStyle/>
+          <a:p>
+            <a:r>
+              <a:rPr sz="1200" b="1" i="0">
                 <a:solidFill>
-                  <a:schemeClr val="bg1"/>
+                  <a:srgbClr val="595959"/>
                 </a:solidFill>
-                <a:latin typeface="Arial" panose="020B0604020202020204" pitchFamily="34" charset="0"/>
-                <a:ea typeface="+mj-ea"/>
-                <a:cs typeface="Arial" panose="020B0604020202020204" pitchFamily="34" charset="0"/>
-              </a:defRPr>
-            </a:lvl1pPr>
-          </a:lstStyle>
-          <a:p>
-            <a:r>
-              <a:rPr sz="2400" b="1" i="0">
+                <a:latin typeface="Arial"/>
+              </a:rPr>
+              <a:t>KP1 · MODULE 5 · VIDEO 5.6</a:t>
+            </a:r>
+          </a:p>
+        </p:txBody>
+      </p:sp>
+      <p:sp>
+        <p:nvSpPr>
+          <p:cNvPr id="3" name="TextBox 2"/>
+          <p:cNvSpPr txBox="1"/>
+          <p:nvPr/>
+        </p:nvSpPr>
+        <p:spPr>
+          <a:xfrm>
+            <a:off x="822960" y="1828800"/>
+            <a:ext cx="2011680" cy="1097280"/>
+          </a:xfrm>
+          <a:prstGeom prst="rect">
+            <a:avLst/>
+          </a:prstGeom>
+          <a:noFill/>
+        </p:spPr>
+        <p:txBody>
+          <a:bodyPr wrap="square">
+            <a:spAutoFit/>
+          </a:bodyPr>
+          <a:lstStyle/>
+          <a:p>
+            <a:r>
+              <a:rPr sz="6000" b="1" i="0">
+                <a:solidFill>
+                  <a:srgbClr val="009CD6"/>
+                </a:solidFill>
+                <a:latin typeface="Arial"/>
+              </a:rPr>
+              <a:t>5.6</a:t>
+            </a:r>
+          </a:p>
+        </p:txBody>
+      </p:sp>
+      <p:sp>
+        <p:nvSpPr>
+          <p:cNvPr id="4" name="TextBox 3"/>
+          <p:cNvSpPr txBox="1"/>
+          <p:nvPr/>
+        </p:nvSpPr>
+        <p:spPr>
+          <a:xfrm>
+            <a:off x="822960" y="2880360"/>
+            <a:ext cx="9601200" cy="1371600"/>
+          </a:xfrm>
+          <a:prstGeom prst="rect">
+            <a:avLst/>
+          </a:prstGeom>
+          <a:noFill/>
+        </p:spPr>
+        <p:txBody>
+          <a:bodyPr wrap="square">
+            <a:spAutoFit/>
+          </a:bodyPr>
+          <a:lstStyle/>
+          <a:p>
+            <a:r>
+              <a:rPr sz="3400" b="1" i="0">
                 <a:solidFill>
                   <a:srgbClr val="1A1A1A"/>
                 </a:solidFill>
                 <a:latin typeface="Arial"/>
               </a:rPr>
-              <a:t>5.6 — The closing case — proven, portable, and necessary now</a:t>
+              <a:t>The closing case — proven, portable, and necessary now</a:t>
             </a:r>
           </a:p>
         </p:txBody>
       </p:sp>
-      <p:pic>
-        <p:nvPicPr>
-          <p:cNvPr id="7" name="Picture 6">
-            <a:extLst>
-              <a:ext uri="{FF2B5EF4-FFF2-40B4-BE49-F238E27FC236}">
-                <a16:creationId xmlns:a16="http://schemas.microsoft.com/office/drawing/2014/main" id="{A2066351-C569-4C4C-A096-308777FCDC32}"/>
-              </a:ext>
-            </a:extLst>
-          </p:cNvPr>
-          <p:cNvPicPr>
-            <a:picLocks noChangeAspect="1"/>
-          </p:cNvPicPr>
+      <p:sp>
+        <p:nvSpPr>
+          <p:cNvPr id="5" name="TextBox 4"/>
+          <p:cNvSpPr txBox="1"/>
           <p:nvPr/>
-        </p:nvPicPr>
-        <p:blipFill>
-          <a:blip r:embed="rId2">
-            <a:extLst>
-              <a:ext uri="{28A0092B-C50C-407E-A947-70E740481C1C}">
-                <a14:useLocalDpi xmlns:a14="http://schemas.microsoft.com/office/drawing/2010/main" val="0"/>
-              </a:ext>
-            </a:extLst>
-          </a:blip>
-          <a:srcRect t="20219" b="14729"/>
-          <a:stretch>
-            <a:fillRect/>
-          </a:stretch>
-        </p:blipFill>
-        <p:spPr>
-          <a:xfrm>
-            <a:off x="0" y="5620871"/>
-            <a:ext cx="1323975" cy="1218816"/>
+        </p:nvSpPr>
+        <p:spPr>
+          <a:xfrm>
+            <a:off x="822960" y="4343400"/>
+            <a:ext cx="9875520" cy="1554480"/>
           </a:xfrm>
           <a:prstGeom prst="rect">
             <a:avLst/>
           </a:prstGeom>
-        </p:spPr>
-      </p:pic>
-      <p:sp>
-        <p:nvSpPr>
-          <p:cNvPr id="14" name="Title 9">
-            <a:extLst>
-              <a:ext uri="{FF2B5EF4-FFF2-40B4-BE49-F238E27FC236}">
-                <a16:creationId xmlns:a16="http://schemas.microsoft.com/office/drawing/2014/main" id="{B5087B80-3EE4-1881-0130-ED58CA625092}"/>
-              </a:ext>
-            </a:extLst>
-          </p:cNvPr>
-          <p:cNvSpPr txBox="1">
-            <a:spLocks/>
-          </p:cNvSpPr>
-          <p:nvPr/>
-        </p:nvSpPr>
-        <p:spPr>
-          <a:xfrm>
-            <a:off x="284452" y="2475786"/>
-            <a:ext cx="6382893" cy="953213"/>
-          </a:xfrm>
-          <a:prstGeom prst="rect">
-            <a:avLst/>
-          </a:prstGeom>
+          <a:noFill/>
         </p:spPr>
         <p:txBody>
-          <a:bodyPr anchor="t">
-            <a:noAutofit/>
+          <a:bodyPr wrap="square">
+            <a:spAutoFit/>
           </a:bodyPr>
-          <a:lstStyle>
-            <a:lvl1pPr algn="l" defTabSz="914400" rtl="0" eaLnBrk="1" latinLnBrk="0" hangingPunct="1">
-              <a:lnSpc>
-                <a:spcPct val="90000"/>
-              </a:lnSpc>
-              <a:spcBef>
-                <a:spcPct val="0"/>
-              </a:spcBef>
-              <a:buNone/>
-              <a:defRPr sz="4000" kern="1200">
-                <a:solidFill>
-                  <a:schemeClr val="bg1"/>
-                </a:solidFill>
-                <a:latin typeface="Arial" panose="020B0604020202020204" pitchFamily="34" charset="0"/>
-                <a:ea typeface="+mj-ea"/>
-                <a:cs typeface="Arial" panose="020B0604020202020204" pitchFamily="34" charset="0"/>
-              </a:defRPr>
-            </a:lvl1pPr>
-          </a:lstStyle>
-          <a:p>
-            <a:pPr marL="0" marR="0" lvl="0" indent="0" rtl="0">
-              <a:spcBef>
-                <a:spcPts val="600"/>
-              </a:spcBef>
-              <a:spcAft>
-                <a:spcPts val="0"/>
-              </a:spcAft>
-              <a:buNone/>
-            </a:pPr>
-            <a:r>
-              <a:rPr sz="1300" b="1" i="0">
-                <a:solidFill>
-                  <a:srgbClr val="006E96"/>
-                </a:solidFill>
-                <a:latin typeface="Arial"/>
-              </a:rPr>
-              <a:t>KP1 · Government Enterprise Architecture · Module 5 · Video 5.6</a:t>
-            </a:r>
-          </a:p>
-          <a:p>
-            <a:r>
-              <a:rPr sz="1200" b="0" i="1">
+          <a:lstStyle/>
+          <a:p>
+            <a:r>
+              <a:rPr sz="1700" b="0" i="1">
                 <a:solidFill>
                   <a:srgbClr val="595959"/>
                 </a:solidFill>
@@ -11774,111 +11685,276 @@
       </p:sp>
       <p:sp>
         <p:nvSpPr>
-          <p:cNvPr id="17" name="Title 9">
-            <a:extLst>
-              <a:ext uri="{FF2B5EF4-FFF2-40B4-BE49-F238E27FC236}">
-                <a16:creationId xmlns:a16="http://schemas.microsoft.com/office/drawing/2014/main" id="{5E8796F7-DD26-D250-5E97-B38B22298E72}"/>
-              </a:ext>
-            </a:extLst>
-          </p:cNvPr>
-          <p:cNvSpPr txBox="1">
-            <a:spLocks/>
-          </p:cNvSpPr>
+          <p:cNvPr id="6" name="TextBox 5"/>
+          <p:cNvSpPr txBox="1"/>
           <p:nvPr/>
         </p:nvSpPr>
         <p:spPr>
           <a:xfrm>
-            <a:off x="284452" y="4363897"/>
-            <a:ext cx="6382893" cy="953213"/>
+            <a:off x="822960" y="5989320"/>
+            <a:ext cx="7315200" cy="365760"/>
           </a:xfrm>
           <a:prstGeom prst="rect">
             <a:avLst/>
           </a:prstGeom>
+          <a:noFill/>
         </p:spPr>
         <p:txBody>
-          <a:bodyPr anchor="t">
-            <a:noAutofit/>
+          <a:bodyPr wrap="square">
+            <a:spAutoFit/>
           </a:bodyPr>
-          <a:lstStyle>
-            <a:lvl1pPr algn="l" defTabSz="914400" rtl="0" eaLnBrk="1" latinLnBrk="0" hangingPunct="1">
-              <a:lnSpc>
-                <a:spcPct val="90000"/>
-              </a:lnSpc>
-              <a:spcBef>
-                <a:spcPct val="0"/>
-              </a:spcBef>
-              <a:buNone/>
-              <a:defRPr sz="4000" kern="1200">
+          <a:lstStyle/>
+          <a:p>
+            <a:r>
+              <a:rPr sz="1200" b="0" i="0">
                 <a:solidFill>
-                  <a:schemeClr val="bg1"/>
+                  <a:srgbClr val="595959"/>
                 </a:solidFill>
-                <a:latin typeface="Arial" panose="020B0604020202020204" pitchFamily="34" charset="0"/>
-                <a:ea typeface="+mj-ea"/>
-                <a:cs typeface="Arial" panose="020B0604020202020204" pitchFamily="34" charset="0"/>
-              </a:defRPr>
-            </a:lvl1pPr>
-          </a:lstStyle>
-          <a:p>
-            <a:pPr marL="0" marR="0" lvl="0" indent="0" rtl="0">
-              <a:spcBef>
-                <a:spcPts val="600"/>
-              </a:spcBef>
-              <a:spcAft>
-                <a:spcPts val="1200"/>
-              </a:spcAft>
-              <a:buNone/>
-            </a:pPr>
-            <a:r>
-              <a:rPr sz="1400" b="1" i="0">
+                <a:latin typeface="Arial"/>
+              </a:rPr>
+              <a:t>~3 minutes · standalone video · voice-over on text slides</a:t>
+            </a:r>
+          </a:p>
+        </p:txBody>
+      </p:sp>
+    </p:spTree>
+  </p:cSld>
+  <p:clrMapOvr>
+    <a:masterClrMapping/>
+  </p:clrMapOvr>
+</p:sld>
+</file>
+
+<file path=ppt/slides/slide43.xml><?xml version="1.0" encoding="utf-8"?>
+<p:sld xmlns:a="http://schemas.openxmlformats.org/drawingml/2006/main" xmlns:p="http://schemas.openxmlformats.org/presentationml/2006/main" xmlns:r="http://schemas.openxmlformats.org/officeDocument/2006/relationships">
+  <p:cSld>
+    <p:spTree>
+      <p:nvGrpSpPr>
+        <p:cNvPr id="1" name=""/>
+        <p:cNvGrpSpPr/>
+        <p:nvPr/>
+      </p:nvGrpSpPr>
+      <p:grpSpPr/>
+      <p:sp>
+        <p:nvSpPr>
+          <p:cNvPr id="2" name="TextBox 1"/>
+          <p:cNvSpPr txBox="1"/>
+          <p:nvPr/>
+        </p:nvSpPr>
+        <p:spPr>
+          <a:xfrm>
+            <a:off x="1005840" y="1325880"/>
+            <a:ext cx="5486400" cy="365760"/>
+          </a:xfrm>
+          <a:prstGeom prst="rect">
+            <a:avLst/>
+          </a:prstGeom>
+          <a:noFill/>
+        </p:spPr>
+        <p:txBody>
+          <a:bodyPr wrap="square">
+            <a:spAutoFit/>
+          </a:bodyPr>
+          <a:lstStyle/>
+          <a:p>
+            <a:r>
+              <a:rPr sz="1200" b="1" i="0">
+                <a:solidFill>
+                  <a:srgbClr val="006E96"/>
+                </a:solidFill>
+                <a:latin typeface="Arial"/>
+              </a:rPr>
+              <a:t>WHERE WE START</a:t>
+            </a:r>
+          </a:p>
+        </p:txBody>
+      </p:sp>
+      <p:sp>
+        <p:nvSpPr>
+          <p:cNvPr id="3" name="TextBox 2"/>
+          <p:cNvSpPr txBox="1"/>
+          <p:nvPr/>
+        </p:nvSpPr>
+        <p:spPr>
+          <a:xfrm>
+            <a:off x="1005840" y="1783080"/>
+            <a:ext cx="10149840" cy="1737360"/>
+          </a:xfrm>
+          <a:prstGeom prst="rect">
+            <a:avLst/>
+          </a:prstGeom>
+          <a:noFill/>
+        </p:spPr>
+        <p:txBody>
+          <a:bodyPr wrap="square">
+            <a:spAutoFit/>
+          </a:bodyPr>
+          <a:lstStyle/>
+          <a:p>
+            <a:r>
+              <a:rPr sz="3000" b="1" i="0">
                 <a:solidFill>
                   <a:srgbClr val="1A1A1A"/>
                 </a:solidFill>
                 <a:latin typeface="Arial"/>
               </a:rPr>
-              <a:t>Length: </a:t>
-            </a:r>
-            <a:r>
-              <a:rPr sz="1400" b="0" i="0">
+              <a:t>Three sentences a minister can hold.</a:t>
+            </a:r>
+          </a:p>
+        </p:txBody>
+      </p:sp>
+      <p:sp>
+        <p:nvSpPr>
+          <p:cNvPr id="4" name="TextBox 3"/>
+          <p:cNvSpPr txBox="1"/>
+          <p:nvPr/>
+        </p:nvSpPr>
+        <p:spPr>
+          <a:xfrm>
+            <a:off x="1005840" y="3611880"/>
+            <a:ext cx="10149840" cy="2377440"/>
+          </a:xfrm>
+          <a:prstGeom prst="rect">
+            <a:avLst/>
+          </a:prstGeom>
+          <a:noFill/>
+        </p:spPr>
+        <p:txBody>
+          <a:bodyPr wrap="square">
+            <a:spAutoFit/>
+          </a:bodyPr>
+          <a:lstStyle/>
+          <a:p>
+            <a:pPr>
+              <a:spcAft>
+                <a:spcPts val="800"/>
+              </a:spcAft>
+            </a:pPr>
+            <a:r>
+              <a:rPr sz="1700" b="0" i="0">
                 <a:solidFill>
-                  <a:srgbClr val="1A1A1A"/>
+                  <a:srgbClr val="595959"/>
                 </a:solidFill>
                 <a:latin typeface="Arial"/>
               </a:rPr>
-              <a:t>~3 mins</a:t>
-            </a:r>
-          </a:p>
-          <a:p>
-            <a:r>
-              <a:rPr sz="1400" b="1" i="0">
+              <a:t>This is proven. It is portable. It is necessary now.</a:t>
+            </a:r>
+          </a:p>
+          <a:p>
+            <a:pPr>
+              <a:spcAft>
+                <a:spcPts val="800"/>
+              </a:spcAft>
+            </a:pPr>
+            <a:r>
+              <a:rPr sz="1700" b="0" i="0">
                 <a:solidFill>
-                  <a:srgbClr val="1A1A1A"/>
+                  <a:srgbClr val="595959"/>
                 </a:solidFill>
                 <a:latin typeface="Arial"/>
               </a:rPr>
-              <a:t>Target audience: </a:t>
-            </a:r>
-            <a:r>
-              <a:rPr sz="1400" b="0" i="0">
+              <a:t>Underneath those sit the two reasons an Enterprise Architecture exists at all.</a:t>
+            </a:r>
+          </a:p>
+        </p:txBody>
+      </p:sp>
+      <p:sp>
+        <p:nvSpPr>
+          <p:cNvPr id="5" name="TextBox 4"/>
+          <p:cNvSpPr txBox="1"/>
+          <p:nvPr/>
+        </p:nvSpPr>
+        <p:spPr>
+          <a:xfrm>
+            <a:off x="457200" y="6473952"/>
+            <a:ext cx="7772400" cy="292608"/>
+          </a:xfrm>
+          <a:prstGeom prst="rect">
+            <a:avLst/>
+          </a:prstGeom>
+          <a:noFill/>
+        </p:spPr>
+        <p:txBody>
+          <a:bodyPr wrap="square">
+            <a:spAutoFit/>
+          </a:bodyPr>
+          <a:lstStyle/>
+          <a:p>
+            <a:r>
+              <a:rPr sz="900" b="0" i="0">
                 <a:solidFill>
-                  <a:srgbClr val="1A1A1A"/>
+                  <a:srgbClr val="595959"/>
                 </a:solidFill>
                 <a:latin typeface="Arial"/>
               </a:rPr>
-              <a:t>Director-general · head of a sectoral ICT unit · technical secretary</a:t>
+              <a:t>5.6 · The closing case — proven, portable, and necessary now</a:t>
             </a:r>
           </a:p>
         </p:txBody>
       </p:sp>
       <p:sp>
         <p:nvSpPr>
-          <p:cNvPr id="18" name="Rectangle 17"/>
+          <p:cNvPr id="6" name="TextBox 5"/>
+          <p:cNvSpPr txBox="1"/>
+          <p:nvPr/>
+        </p:nvSpPr>
+        <p:spPr>
+          <a:xfrm>
+            <a:off x="10058400" y="6473952"/>
+            <a:ext cx="1673352" cy="292608"/>
+          </a:xfrm>
+          <a:prstGeom prst="rect">
+            <a:avLst/>
+          </a:prstGeom>
+          <a:noFill/>
+        </p:spPr>
+        <p:txBody>
+          <a:bodyPr wrap="square">
+            <a:spAutoFit/>
+          </a:bodyPr>
+          <a:lstStyle/>
+          <a:p>
+            <a:pPr algn="r"/>
+            <a:r>
+              <a:rPr sz="900" b="0" i="0">
+                <a:solidFill>
+                  <a:srgbClr val="595959"/>
+                </a:solidFill>
+                <a:latin typeface="Arial"/>
+              </a:rPr>
+              <a:t>www.itu.int</a:t>
+            </a:r>
+          </a:p>
+        </p:txBody>
+      </p:sp>
+    </p:spTree>
+  </p:cSld>
+  <p:clrMapOvr>
+    <a:masterClrMapping/>
+  </p:clrMapOvr>
+</p:sld>
+</file>
+
+<file path=ppt/slides/slide44.xml><?xml version="1.0" encoding="utf-8"?>
+<p:sld xmlns:a="http://schemas.openxmlformats.org/drawingml/2006/main" xmlns:p="http://schemas.openxmlformats.org/presentationml/2006/main" xmlns:r="http://schemas.openxmlformats.org/officeDocument/2006/relationships">
+  <p:cSld>
+    <p:spTree>
+      <p:nvGrpSpPr>
+        <p:cNvPr id="1" name=""/>
+        <p:cNvGrpSpPr/>
+        <p:nvPr/>
+      </p:nvGrpSpPr>
+      <p:grpSpPr/>
+      <p:sp>
+        <p:nvSpPr>
+          <p:cNvPr id="2" name="Rectangle 1"/>
           <p:cNvSpPr/>
           <p:nvPr/>
         </p:nvSpPr>
         <p:spPr>
           <a:xfrm>
-            <a:off x="7022592" y="0"/>
-            <a:ext cx="5169103" cy="6858000"/>
+            <a:off x="457200" y="384048"/>
+            <a:ext cx="45720" cy="256032"/>
           </a:xfrm>
           <a:prstGeom prst="rect">
             <a:avLst/>
@@ -11915,14 +11991,14 @@
       </p:sp>
       <p:sp>
         <p:nvSpPr>
-          <p:cNvPr id="19" name="TextBox 18"/>
+          <p:cNvPr id="3" name="TextBox 2"/>
           <p:cNvSpPr txBox="1"/>
           <p:nvPr/>
         </p:nvSpPr>
         <p:spPr>
           <a:xfrm>
-            <a:off x="7452360" y="457200"/>
-            <a:ext cx="4297680" cy="457200"/>
+            <a:off x="621792" y="274320"/>
+            <a:ext cx="11247120" cy="914400"/>
           </a:xfrm>
           <a:prstGeom prst="rect">
             <a:avLst/>
@@ -11936,553 +12012,35 @@
           <a:lstStyle/>
           <a:p>
             <a:r>
-              <a:rPr sz="1100" b="1" i="0">
-                <a:solidFill>
-                  <a:srgbClr val="E5F5FB"/>
-                </a:solidFill>
-                <a:latin typeface="Arial"/>
-              </a:rPr>
-              <a:t>THE CASE YOU CARRY INTO THE ROOM</a:t>
-            </a:r>
-          </a:p>
-        </p:txBody>
-      </p:sp>
-      <p:sp>
-        <p:nvSpPr>
-          <p:cNvPr id="20" name="Rounded Rectangle 19"/>
-          <p:cNvSpPr/>
-          <p:nvPr/>
-        </p:nvSpPr>
-        <p:spPr>
-          <a:xfrm>
-            <a:off x="7452360" y="960120"/>
-            <a:ext cx="3840480" cy="658368"/>
-          </a:xfrm>
-          <a:prstGeom prst="roundRect">
-            <a:avLst>
-              <a:gd name="adj" fmla="val 14000"/>
-            </a:avLst>
-          </a:prstGeom>
-          <a:solidFill>
-            <a:srgbClr val="FFFFFF"/>
-          </a:solidFill>
-          <a:ln>
-            <a:noFill/>
-          </a:ln>
-          <a:effectLst/>
-        </p:spPr>
-        <p:style>
-          <a:lnRef idx="1">
-            <a:schemeClr val="accent1"/>
-          </a:lnRef>
-          <a:fillRef idx="3">
-            <a:schemeClr val="accent1"/>
-          </a:fillRef>
-          <a:effectRef idx="2">
-            <a:schemeClr val="accent1"/>
-          </a:effectRef>
-          <a:fontRef idx="minor">
-            <a:schemeClr val="lt1"/>
-          </a:fontRef>
-        </p:style>
-        <p:txBody>
-          <a:bodyPr rtlCol="0" anchor="ctr" lIns="164592" wrap="square"/>
-          <a:lstStyle/>
-          <a:p>
-            <a:pPr algn="ctr"/>
-            <a:r>
-              <a:rPr sz="1500" b="1" i="0">
+              <a:rPr sz="2800" b="1" i="0">
                 <a:solidFill>
                   <a:srgbClr val="1A1A1A"/>
                 </a:solidFill>
                 <a:latin typeface="Arial"/>
               </a:rPr>
-              <a:t>Proven — four real governments</a:t>
+              <a:t>Proven and portable — the first two you can say plainly</a:t>
             </a:r>
           </a:p>
         </p:txBody>
       </p:sp>
       <p:sp>
         <p:nvSpPr>
-          <p:cNvPr id="21" name="Rounded Rectangle 20"/>
+          <p:cNvPr id="4" name="Rounded Rectangle 3"/>
           <p:cNvSpPr/>
           <p:nvPr/>
         </p:nvSpPr>
         <p:spPr>
           <a:xfrm>
-            <a:off x="7452360" y="1892808"/>
-            <a:ext cx="3840480" cy="658368"/>
+            <a:off x="658368" y="1554480"/>
+            <a:ext cx="5394960" cy="2926080"/>
           </a:xfrm>
           <a:prstGeom prst="roundRect">
             <a:avLst>
-              <a:gd name="adj" fmla="val 14000"/>
+              <a:gd name="adj" fmla="val 4500"/>
             </a:avLst>
           </a:prstGeom>
           <a:solidFill>
-            <a:srgbClr val="FFFFFF"/>
-          </a:solidFill>
-          <a:ln>
-            <a:noFill/>
-          </a:ln>
-          <a:effectLst/>
-        </p:spPr>
-        <p:style>
-          <a:lnRef idx="1">
-            <a:schemeClr val="accent1"/>
-          </a:lnRef>
-          <a:fillRef idx="3">
-            <a:schemeClr val="accent1"/>
-          </a:fillRef>
-          <a:effectRef idx="2">
-            <a:schemeClr val="accent1"/>
-          </a:effectRef>
-          <a:fontRef idx="minor">
-            <a:schemeClr val="lt1"/>
-          </a:fontRef>
-        </p:style>
-        <p:txBody>
-          <a:bodyPr rtlCol="0" anchor="ctr" lIns="164592" wrap="square"/>
-          <a:lstStyle/>
-          <a:p>
-            <a:pPr algn="ctr"/>
-            <a:r>
-              <a:rPr sz="1500" b="1" i="0">
-                <a:solidFill>
-                  <a:srgbClr val="1A1A1A"/>
-                </a:solidFill>
-                <a:latin typeface="Arial"/>
-              </a:rPr>
-              <a:t>Portable — sector after sector</a:t>
-            </a:r>
-          </a:p>
-        </p:txBody>
-      </p:sp>
-      <p:sp>
-        <p:nvSpPr>
-          <p:cNvPr id="22" name="Rounded Rectangle 21"/>
-          <p:cNvSpPr/>
-          <p:nvPr/>
-        </p:nvSpPr>
-        <p:spPr>
-          <a:xfrm>
-            <a:off x="7452360" y="2825496"/>
-            <a:ext cx="3840480" cy="658368"/>
-          </a:xfrm>
-          <a:prstGeom prst="roundRect">
-            <a:avLst>
-              <a:gd name="adj" fmla="val 14000"/>
-            </a:avLst>
-          </a:prstGeom>
-          <a:solidFill>
-            <a:srgbClr val="FFFFFF"/>
-          </a:solidFill>
-          <a:ln>
-            <a:noFill/>
-          </a:ln>
-          <a:effectLst/>
-        </p:spPr>
-        <p:style>
-          <a:lnRef idx="1">
-            <a:schemeClr val="accent1"/>
-          </a:lnRef>
-          <a:fillRef idx="3">
-            <a:schemeClr val="accent1"/>
-          </a:fillRef>
-          <a:effectRef idx="2">
-            <a:schemeClr val="accent1"/>
-          </a:effectRef>
-          <a:fontRef idx="minor">
-            <a:schemeClr val="lt1"/>
-          </a:fontRef>
-        </p:style>
-        <p:txBody>
-          <a:bodyPr rtlCol="0" anchor="ctr" lIns="164592" wrap="square"/>
-          <a:lstStyle/>
-          <a:p>
-            <a:pPr algn="ctr"/>
-            <a:r>
-              <a:rPr sz="1500" b="1" i="0">
-                <a:solidFill>
-                  <a:srgbClr val="1A1A1A"/>
-                </a:solidFill>
-                <a:latin typeface="Arial"/>
-              </a:rPr>
-              <a:t>The commitment — the one page</a:t>
-            </a:r>
-          </a:p>
-        </p:txBody>
-      </p:sp>
-      <p:sp>
-        <p:nvSpPr>
-          <p:cNvPr id="23" name="Rounded Rectangle 22"/>
-          <p:cNvSpPr/>
-          <p:nvPr/>
-        </p:nvSpPr>
-        <p:spPr>
-          <a:xfrm>
-            <a:off x="7452360" y="3758184"/>
-            <a:ext cx="3840480" cy="658368"/>
-          </a:xfrm>
-          <a:prstGeom prst="roundRect">
-            <a:avLst>
-              <a:gd name="adj" fmla="val 14000"/>
-            </a:avLst>
-          </a:prstGeom>
-          <a:solidFill>
-            <a:srgbClr val="FFFFFF"/>
-          </a:solidFill>
-          <a:ln>
-            <a:noFill/>
-          </a:ln>
-          <a:effectLst/>
-        </p:spPr>
-        <p:style>
-          <a:lnRef idx="1">
-            <a:schemeClr val="accent1"/>
-          </a:lnRef>
-          <a:fillRef idx="3">
-            <a:schemeClr val="accent1"/>
-          </a:fillRef>
-          <a:effectRef idx="2">
-            <a:schemeClr val="accent1"/>
-          </a:effectRef>
-          <a:fontRef idx="minor">
-            <a:schemeClr val="lt1"/>
-          </a:fontRef>
-        </p:style>
-        <p:txBody>
-          <a:bodyPr rtlCol="0" anchor="ctr" lIns="164592" wrap="square"/>
-          <a:lstStyle/>
-          <a:p>
-            <a:pPr algn="ctr"/>
-            <a:r>
-              <a:rPr sz="1500" b="1" i="0">
-                <a:solidFill>
-                  <a:srgbClr val="1A1A1A"/>
-                </a:solidFill>
-                <a:latin typeface="Arial"/>
-              </a:rPr>
-              <a:t>The capability — your own people</a:t>
-            </a:r>
-          </a:p>
-        </p:txBody>
-      </p:sp>
-      <p:sp>
-        <p:nvSpPr>
-          <p:cNvPr id="24" name="Rounded Rectangle 23"/>
-          <p:cNvSpPr/>
-          <p:nvPr/>
-        </p:nvSpPr>
-        <p:spPr>
-          <a:xfrm>
-            <a:off x="7452360" y="4690872"/>
-            <a:ext cx="3840480" cy="658368"/>
-          </a:xfrm>
-          <a:prstGeom prst="roundRect">
-            <a:avLst>
-              <a:gd name="adj" fmla="val 14000"/>
-            </a:avLst>
-          </a:prstGeom>
-          <a:solidFill>
-            <a:srgbClr val="006E96"/>
-          </a:solidFill>
-          <a:ln>
-            <a:noFill/>
-          </a:ln>
-          <a:effectLst/>
-        </p:spPr>
-        <p:style>
-          <a:lnRef idx="1">
-            <a:schemeClr val="accent1"/>
-          </a:lnRef>
-          <a:fillRef idx="3">
-            <a:schemeClr val="accent1"/>
-          </a:fillRef>
-          <a:effectRef idx="2">
-            <a:schemeClr val="accent1"/>
-          </a:effectRef>
-          <a:fontRef idx="minor">
-            <a:schemeClr val="lt1"/>
-          </a:fontRef>
-        </p:style>
-        <p:txBody>
-          <a:bodyPr rtlCol="0" anchor="ctr" lIns="164592" wrap="square"/>
-          <a:lstStyle/>
-          <a:p>
-            <a:pPr algn="ctr"/>
-            <a:r>
-              <a:rPr sz="1500" b="1" i="0">
-                <a:solidFill>
-                  <a:srgbClr val="FFFFFF"/>
-                </a:solidFill>
-                <a:latin typeface="Arial"/>
-              </a:rPr>
-              <a:t>Necessary now, not just useful</a:t>
-            </a:r>
-          </a:p>
-        </p:txBody>
-      </p:sp>
-      <p:sp>
-        <p:nvSpPr>
-          <p:cNvPr id="25" name="TextBox 24"/>
-          <p:cNvSpPr txBox="1"/>
-          <p:nvPr/>
-        </p:nvSpPr>
-        <p:spPr>
-          <a:xfrm>
-            <a:off x="7452360" y="5806440"/>
-            <a:ext cx="4297680" cy="731520"/>
-          </a:xfrm>
-          <a:prstGeom prst="rect">
-            <a:avLst/>
-          </a:prstGeom>
-          <a:noFill/>
-        </p:spPr>
-        <p:txBody>
-          <a:bodyPr wrap="square">
-            <a:spAutoFit/>
-          </a:bodyPr>
-          <a:lstStyle/>
-          <a:p>
-            <a:r>
-              <a:rPr sz="1200" b="0" i="0">
-                <a:solidFill>
-                  <a:srgbClr val="FFFFFF"/>
-                </a:solidFill>
-                <a:latin typeface="Arial"/>
-              </a:rPr>
-              <a:t>4 governments · 4 killers to design out · 1 page for the minister</a:t>
-            </a:r>
-          </a:p>
-        </p:txBody>
-      </p:sp>
-    </p:spTree>
-    <p:extLst>
-      <p:ext uri="{BB962C8B-B14F-4D97-AF65-F5344CB8AC3E}">
-        <p14:creationId xmlns:p14="http://schemas.microsoft.com/office/powerpoint/2010/main" val="1196800265"/>
-      </p:ext>
-    </p:extLst>
-  </p:cSld>
-  <p:clrMapOvr>
-    <a:masterClrMapping/>
-  </p:clrMapOvr>
-</p:sld>
-</file>
-
-<file path=ppt/slides/slide37.xml><?xml version="1.0" encoding="utf-8"?>
-<p:sld xmlns:a="http://schemas.openxmlformats.org/drawingml/2006/main" xmlns:p="http://schemas.openxmlformats.org/presentationml/2006/main" xmlns:r="http://schemas.openxmlformats.org/officeDocument/2006/relationships">
-  <p:cSld>
-    <p:spTree>
-      <p:nvGrpSpPr>
-        <p:cNvPr id="1" name=""/>
-        <p:cNvGrpSpPr/>
-        <p:nvPr/>
-      </p:nvGrpSpPr>
-      <p:grpSpPr/>
-      <p:sp>
-        <p:nvSpPr>
-          <p:cNvPr id="2" name="TextBox 1"/>
-          <p:cNvSpPr txBox="1"/>
-          <p:nvPr/>
-        </p:nvSpPr>
-        <p:spPr>
-          <a:xfrm>
-            <a:off x="822960" y="822960"/>
-            <a:ext cx="7315200" cy="457200"/>
-          </a:xfrm>
-          <a:prstGeom prst="rect">
-            <a:avLst/>
-          </a:prstGeom>
-          <a:noFill/>
-        </p:spPr>
-        <p:txBody>
-          <a:bodyPr wrap="square">
-            <a:spAutoFit/>
-          </a:bodyPr>
-          <a:lstStyle/>
-          <a:p>
-            <a:r>
-              <a:rPr sz="1200" b="1" i="0">
-                <a:solidFill>
-                  <a:srgbClr val="595959"/>
-                </a:solidFill>
-                <a:latin typeface="Arial"/>
-              </a:rPr>
-              <a:t>KP1 · MODULE 5 · VIDEO 5.6</a:t>
-            </a:r>
-          </a:p>
-        </p:txBody>
-      </p:sp>
-      <p:sp>
-        <p:nvSpPr>
-          <p:cNvPr id="3" name="TextBox 2"/>
-          <p:cNvSpPr txBox="1"/>
-          <p:nvPr/>
-        </p:nvSpPr>
-        <p:spPr>
-          <a:xfrm>
-            <a:off x="822960" y="1828800"/>
-            <a:ext cx="2011680" cy="1097280"/>
-          </a:xfrm>
-          <a:prstGeom prst="rect">
-            <a:avLst/>
-          </a:prstGeom>
-          <a:noFill/>
-        </p:spPr>
-        <p:txBody>
-          <a:bodyPr wrap="square">
-            <a:spAutoFit/>
-          </a:bodyPr>
-          <a:lstStyle/>
-          <a:p>
-            <a:r>
-              <a:rPr sz="6000" b="1" i="0">
-                <a:solidFill>
-                  <a:srgbClr val="009CD6"/>
-                </a:solidFill>
-                <a:latin typeface="Arial"/>
-              </a:rPr>
-              <a:t>5.6</a:t>
-            </a:r>
-          </a:p>
-        </p:txBody>
-      </p:sp>
-      <p:sp>
-        <p:nvSpPr>
-          <p:cNvPr id="4" name="TextBox 3"/>
-          <p:cNvSpPr txBox="1"/>
-          <p:nvPr/>
-        </p:nvSpPr>
-        <p:spPr>
-          <a:xfrm>
-            <a:off x="822960" y="2880360"/>
-            <a:ext cx="9601200" cy="1371600"/>
-          </a:xfrm>
-          <a:prstGeom prst="rect">
-            <a:avLst/>
-          </a:prstGeom>
-          <a:noFill/>
-        </p:spPr>
-        <p:txBody>
-          <a:bodyPr wrap="square">
-            <a:spAutoFit/>
-          </a:bodyPr>
-          <a:lstStyle/>
-          <a:p>
-            <a:r>
-              <a:rPr sz="3400" b="1" i="0">
-                <a:solidFill>
-                  <a:srgbClr val="1A1A1A"/>
-                </a:solidFill>
-                <a:latin typeface="Arial"/>
-              </a:rPr>
-              <a:t>The closing case — proven, portable, and necessary now</a:t>
-            </a:r>
-          </a:p>
-        </p:txBody>
-      </p:sp>
-      <p:sp>
-        <p:nvSpPr>
-          <p:cNvPr id="5" name="TextBox 4"/>
-          <p:cNvSpPr txBox="1"/>
-          <p:nvPr/>
-        </p:nvSpPr>
-        <p:spPr>
-          <a:xfrm>
-            <a:off x="822960" y="4343400"/>
-            <a:ext cx="9875520" cy="1554480"/>
-          </a:xfrm>
-          <a:prstGeom prst="rect">
-            <a:avLst/>
-          </a:prstGeom>
-          <a:noFill/>
-        </p:spPr>
-        <p:txBody>
-          <a:bodyPr wrap="square">
-            <a:spAutoFit/>
-          </a:bodyPr>
-          <a:lstStyle/>
-          <a:p>
-            <a:r>
-              <a:rPr sz="1700" b="0" i="1">
-                <a:solidFill>
-                  <a:srgbClr val="595959"/>
-                </a:solidFill>
-                <a:latin typeface="Arial"/>
-              </a:rPr>
-              <a:t>The case for a national EA comes down to three things you can now say with confidence — it is proven, it is portable, and in the era of redesigning how government works it is no longer optional but necessary — held together by the two reasons an EA exists: it makes re-use possible, and it gives business and IT a shared language.</a:t>
-            </a:r>
-          </a:p>
-        </p:txBody>
-      </p:sp>
-      <p:sp>
-        <p:nvSpPr>
-          <p:cNvPr id="6" name="TextBox 5"/>
-          <p:cNvSpPr txBox="1"/>
-          <p:nvPr/>
-        </p:nvSpPr>
-        <p:spPr>
-          <a:xfrm>
-            <a:off x="822960" y="5989320"/>
-            <a:ext cx="7315200" cy="365760"/>
-          </a:xfrm>
-          <a:prstGeom prst="rect">
-            <a:avLst/>
-          </a:prstGeom>
-          <a:noFill/>
-        </p:spPr>
-        <p:txBody>
-          <a:bodyPr wrap="square">
-            <a:spAutoFit/>
-          </a:bodyPr>
-          <a:lstStyle/>
-          <a:p>
-            <a:r>
-              <a:rPr sz="1200" b="0" i="0">
-                <a:solidFill>
-                  <a:srgbClr val="595959"/>
-                </a:solidFill>
-                <a:latin typeface="Arial"/>
-              </a:rPr>
-              <a:t>~3 minutes · standalone video · voice-over on text slides</a:t>
-            </a:r>
-          </a:p>
-        </p:txBody>
-      </p:sp>
-    </p:spTree>
-  </p:cSld>
-  <p:clrMapOvr>
-    <a:masterClrMapping/>
-  </p:clrMapOvr>
-</p:sld>
-</file>
-
-<file path=ppt/slides/slide38.xml><?xml version="1.0" encoding="utf-8"?>
-<p:sld xmlns:a="http://schemas.openxmlformats.org/drawingml/2006/main" xmlns:p="http://schemas.openxmlformats.org/presentationml/2006/main" xmlns:r="http://schemas.openxmlformats.org/officeDocument/2006/relationships">
-  <p:cSld>
-    <p:spTree>
-      <p:nvGrpSpPr>
-        <p:cNvPr id="1" name=""/>
-        <p:cNvGrpSpPr/>
-        <p:nvPr/>
-      </p:nvGrpSpPr>
-      <p:grpSpPr/>
-      <p:sp>
-        <p:nvSpPr>
-          <p:cNvPr id="2" name="Rectangle 1"/>
-          <p:cNvSpPr/>
-          <p:nvPr/>
-        </p:nvSpPr>
-        <p:spPr>
-          <a:xfrm>
-            <a:off x="457200" y="384048"/>
-            <a:ext cx="45720" cy="256032"/>
-          </a:xfrm>
-          <a:prstGeom prst="rect">
-            <a:avLst/>
-          </a:prstGeom>
-          <a:solidFill>
-            <a:srgbClr val="009CD6"/>
+            <a:srgbClr val="E5F5FB"/>
           </a:solidFill>
           <a:ln>
             <a:noFill/>
@@ -12513,14 +12071,14 @@
       </p:sp>
       <p:sp>
         <p:nvSpPr>
-          <p:cNvPr id="3" name="TextBox 2"/>
+          <p:cNvPr id="5" name="TextBox 4"/>
           <p:cNvSpPr txBox="1"/>
           <p:nvPr/>
         </p:nvSpPr>
         <p:spPr>
           <a:xfrm>
-            <a:off x="621792" y="274320"/>
-            <a:ext cx="11247120" cy="914400"/>
+            <a:off x="859536" y="1700784"/>
+            <a:ext cx="4992624" cy="2651760"/>
           </a:xfrm>
           <a:prstGeom prst="rect">
             <a:avLst/>
@@ -12533,27 +12091,80 @@
           </a:bodyPr>
           <a:lstStyle/>
           <a:p>
-            <a:r>
-              <a:rPr sz="2800" b="1" i="0">
+            <a:pPr>
+              <a:spcAft>
+                <a:spcPts val="700"/>
+              </a:spcAft>
+            </a:pPr>
+            <a:r>
+              <a:rPr sz="1900" b="1" i="0">
+                <a:solidFill>
+                  <a:srgbClr val="006E96"/>
+                </a:solidFill>
+                <a:latin typeface="Arial"/>
+              </a:rPr>
+              <a:t>PROVEN</a:t>
+            </a:r>
+          </a:p>
+          <a:p>
+            <a:pPr>
+              <a:spcAft>
+                <a:spcPts val="700"/>
+              </a:spcAft>
+            </a:pPr>
+            <a:r>
+              <a:rPr sz="1600" b="0" i="0">
                 <a:solidFill>
                   <a:srgbClr val="1A1A1A"/>
                 </a:solidFill>
                 <a:latin typeface="Arial"/>
               </a:rPr>
-              <a:t>Proven and portable — the first two you can say plainly</a:t>
+              <a:t>Four very different governments built the same pattern.</a:t>
+            </a:r>
+          </a:p>
+          <a:p>
+            <a:pPr>
+              <a:spcAft>
+                <a:spcPts val="700"/>
+              </a:spcAft>
+            </a:pPr>
+            <a:r>
+              <a:rPr sz="1600" b="0" i="0">
+                <a:solidFill>
+                  <a:srgbClr val="1A1A1A"/>
+                </a:solidFill>
+                <a:latin typeface="Arial"/>
+              </a:rPr>
+              <a:t>Successes and failures both documented.</a:t>
+            </a:r>
+          </a:p>
+          <a:p>
+            <a:pPr>
+              <a:spcAft>
+                <a:spcPts val="700"/>
+              </a:spcAft>
+            </a:pPr>
+            <a:r>
+              <a:rPr sz="1600" b="0" i="0">
+                <a:solidFill>
+                  <a:srgbClr val="1A1A1A"/>
+                </a:solidFill>
+                <a:latin typeface="Arial"/>
+              </a:rPr>
+              <a:t>You adapt a charted path rather than invent one.</a:t>
             </a:r>
           </a:p>
         </p:txBody>
       </p:sp>
       <p:sp>
         <p:nvSpPr>
-          <p:cNvPr id="4" name="Rounded Rectangle 3"/>
+          <p:cNvPr id="6" name="Rounded Rectangle 5"/>
           <p:cNvSpPr/>
           <p:nvPr/>
         </p:nvSpPr>
         <p:spPr>
           <a:xfrm>
-            <a:off x="658368" y="1554480"/>
+            <a:off x="6263640" y="1554480"/>
             <a:ext cx="5394960" cy="2926080"/>
           </a:xfrm>
           <a:prstGeom prst="roundRect">
@@ -12562,7 +12173,7 @@
             </a:avLst>
           </a:prstGeom>
           <a:solidFill>
-            <a:srgbClr val="E5F5FB"/>
+            <a:srgbClr val="F2F2F2"/>
           </a:solidFill>
           <a:ln>
             <a:noFill/>
@@ -12593,13 +12204,13 @@
       </p:sp>
       <p:sp>
         <p:nvSpPr>
-          <p:cNvPr id="5" name="TextBox 4"/>
+          <p:cNvPr id="7" name="TextBox 6"/>
           <p:cNvSpPr txBox="1"/>
           <p:nvPr/>
         </p:nvSpPr>
         <p:spPr>
           <a:xfrm>
-            <a:off x="859536" y="1700784"/>
+            <a:off x="6464808" y="1700784"/>
             <a:ext cx="4992624" cy="2651760"/>
           </a:xfrm>
           <a:prstGeom prst="rect">
@@ -12625,7 +12236,7 @@
                 </a:solidFill>
                 <a:latin typeface="Arial"/>
               </a:rPr>
-              <a:t>PROVEN</a:t>
+              <a:t>PORTABLE</a:t>
             </a:r>
           </a:p>
           <a:p>
@@ -12641,7 +12252,7 @@
                 </a:solidFill>
                 <a:latin typeface="Arial"/>
               </a:rPr>
-              <a:t>Four very different governments built the same pattern.</a:t>
+              <a:t>The method is sector-agnostic.</a:t>
             </a:r>
           </a:p>
           <a:p>
@@ -12657,7 +12268,7 @@
                 </a:solidFill>
                 <a:latin typeface="Arial"/>
               </a:rPr>
-              <a:t>Successes and failures both documented.</a:t>
+              <a:t>The same phases on a learner, a patient, a farmer.</a:t>
             </a:r>
           </a:p>
           <a:p>
@@ -12673,29 +12284,113 @@
                 </a:solidFill>
                 <a:latin typeface="Arial"/>
               </a:rPr>
-              <a:t>You adapt a charted path rather than invent one.</a:t>
+              <a:t>Each sector after the first costs less — the muscle is built once.</a:t>
             </a:r>
           </a:p>
         </p:txBody>
       </p:sp>
       <p:sp>
         <p:nvSpPr>
-          <p:cNvPr id="6" name="Rounded Rectangle 5"/>
+          <p:cNvPr id="8" name="TextBox 7"/>
+          <p:cNvSpPr txBox="1"/>
+          <p:nvPr/>
+        </p:nvSpPr>
+        <p:spPr>
+          <a:xfrm>
+            <a:off x="658368" y="4663440"/>
+            <a:ext cx="10881360" cy="548640"/>
+          </a:xfrm>
+          <a:prstGeom prst="rect">
+            <a:avLst/>
+          </a:prstGeom>
+          <a:noFill/>
+        </p:spPr>
+        <p:txBody>
+          <a:bodyPr wrap="square">
+            <a:spAutoFit/>
+          </a:bodyPr>
+          <a:lstStyle/>
+          <a:p>
+            <a:r>
+              <a:rPr sz="1550" b="1" i="0">
+                <a:solidFill>
+                  <a:srgbClr val="006E96"/>
+                </a:solidFill>
+                <a:latin typeface="Arial"/>
+              </a:rPr>
+              <a:t>The third is the one that makes it urgent.</a:t>
+            </a:r>
+          </a:p>
+        </p:txBody>
+      </p:sp>
+      <p:sp>
+        <p:nvSpPr>
+          <p:cNvPr id="9" name="TextBox 8"/>
+          <p:cNvSpPr txBox="1"/>
+          <p:nvPr/>
+        </p:nvSpPr>
+        <p:spPr>
+          <a:xfrm>
+            <a:off x="457200" y="6473952"/>
+            <a:ext cx="7772400" cy="292608"/>
+          </a:xfrm>
+          <a:prstGeom prst="rect">
+            <a:avLst/>
+          </a:prstGeom>
+          <a:noFill/>
+        </p:spPr>
+        <p:txBody>
+          <a:bodyPr wrap="square">
+            <a:spAutoFit/>
+          </a:bodyPr>
+          <a:lstStyle/>
+          <a:p>
+            <a:r>
+              <a:rPr sz="900" b="0" i="0">
+                <a:solidFill>
+                  <a:srgbClr val="595959"/>
+                </a:solidFill>
+                <a:latin typeface="Arial"/>
+              </a:rPr>
+              <a:t>5.6 · The closing case — proven, portable, and necessary now</a:t>
+            </a:r>
+          </a:p>
+        </p:txBody>
+      </p:sp>
+    </p:spTree>
+  </p:cSld>
+  <p:clrMapOvr>
+    <a:masterClrMapping/>
+  </p:clrMapOvr>
+</p:sld>
+</file>
+
+<file path=ppt/slides/slide45.xml><?xml version="1.0" encoding="utf-8"?>
+<p:sld xmlns:a="http://schemas.openxmlformats.org/drawingml/2006/main" xmlns:p="http://schemas.openxmlformats.org/presentationml/2006/main" xmlns:r="http://schemas.openxmlformats.org/officeDocument/2006/relationships">
+  <p:cSld>
+    <p:spTree>
+      <p:nvGrpSpPr>
+        <p:cNvPr id="1" name=""/>
+        <p:cNvGrpSpPr/>
+        <p:nvPr/>
+      </p:nvGrpSpPr>
+      <p:grpSpPr/>
+      <p:sp>
+        <p:nvSpPr>
+          <p:cNvPr id="2" name="Rectangle 1"/>
           <p:cNvSpPr/>
           <p:nvPr/>
         </p:nvSpPr>
         <p:spPr>
           <a:xfrm>
-            <a:off x="6263640" y="1554480"/>
-            <a:ext cx="5394960" cy="2926080"/>
-          </a:xfrm>
-          <a:prstGeom prst="roundRect">
-            <a:avLst>
-              <a:gd name="adj" fmla="val 4500"/>
-            </a:avLst>
+            <a:off x="457200" y="384048"/>
+            <a:ext cx="45720" cy="256032"/>
+          </a:xfrm>
+          <a:prstGeom prst="rect">
+            <a:avLst/>
           </a:prstGeom>
           <a:solidFill>
-            <a:srgbClr val="F2F2F2"/>
+            <a:srgbClr val="009CD6"/>
           </a:solidFill>
           <a:ln>
             <a:noFill/>
@@ -12726,14 +12421,14 @@
       </p:sp>
       <p:sp>
         <p:nvSpPr>
-          <p:cNvPr id="7" name="TextBox 6"/>
+          <p:cNvPr id="3" name="TextBox 2"/>
           <p:cNvSpPr txBox="1"/>
           <p:nvPr/>
         </p:nvSpPr>
         <p:spPr>
           <a:xfrm>
-            <a:off x="6464808" y="1700784"/>
-            <a:ext cx="4992624" cy="2651760"/>
+            <a:off x="621792" y="274320"/>
+            <a:ext cx="11247120" cy="914400"/>
           </a:xfrm>
           <a:prstGeom prst="rect">
             <a:avLst/>
@@ -12746,170 +12441,88 @@
           </a:bodyPr>
           <a:lstStyle/>
           <a:p>
-            <a:pPr>
-              <a:spcAft>
-                <a:spcPts val="700"/>
-              </a:spcAft>
-            </a:pPr>
-            <a:r>
-              <a:rPr sz="1900" b="1" i="0">
-                <a:solidFill>
-                  <a:srgbClr val="006E96"/>
-                </a:solidFill>
-                <a:latin typeface="Arial"/>
-              </a:rPr>
-              <a:t>PORTABLE</a:t>
-            </a:r>
-          </a:p>
-          <a:p>
-            <a:pPr>
-              <a:spcAft>
-                <a:spcPts val="700"/>
-              </a:spcAft>
-            </a:pPr>
-            <a:r>
-              <a:rPr sz="1600" b="0" i="0">
+            <a:r>
+              <a:rPr sz="2800" b="1" i="0">
                 <a:solidFill>
                   <a:srgbClr val="1A1A1A"/>
                 </a:solidFill>
                 <a:latin typeface="Arial"/>
               </a:rPr>
-              <a:t>The method is sector-agnostic.</a:t>
-            </a:r>
-          </a:p>
+              <a:t>For thirty years, digital government meant putting paper online. That era is ending</a:t>
+            </a:r>
+          </a:p>
+        </p:txBody>
+      </p:sp>
+      <p:sp>
+        <p:nvSpPr>
+          <p:cNvPr id="4" name="TextBox 3"/>
+          <p:cNvSpPr txBox="1"/>
+          <p:nvPr/>
+        </p:nvSpPr>
+        <p:spPr>
+          <a:xfrm>
+            <a:off x="658368" y="1600200"/>
+            <a:ext cx="10881360" cy="2194560"/>
+          </a:xfrm>
+          <a:prstGeom prst="rect">
+            <a:avLst/>
+          </a:prstGeom>
+          <a:noFill/>
+        </p:spPr>
+        <p:txBody>
+          <a:bodyPr wrap="square">
+            <a:spAutoFit/>
+          </a:bodyPr>
+          <a:lstStyle/>
           <a:p>
             <a:pPr>
               <a:spcAft>
-                <a:spcPts val="700"/>
+                <a:spcPts val="1200"/>
               </a:spcAft>
             </a:pPr>
             <a:r>
-              <a:rPr sz="1600" b="0" i="0">
+              <a:rPr sz="2000" b="0" i="0">
                 <a:solidFill>
                   <a:srgbClr val="1A1A1A"/>
                 </a:solidFill>
                 <a:latin typeface="Arial"/>
               </a:rPr>
-              <a:t>The same phases on a learner, a patient, a farmer.</a:t>
+              <a:t>The form became a web form, the queue an appointment. The work that delivers today is different: once-only data sharing, a shared identity, a single record that follows a person across services.</a:t>
             </a:r>
           </a:p>
           <a:p>
             <a:pPr>
               <a:spcAft>
-                <a:spcPts val="700"/>
+                <a:spcPts val="1200"/>
               </a:spcAft>
             </a:pPr>
             <a:r>
-              <a:rPr sz="1600" b="0" i="0">
+              <a:rPr sz="2000" b="0" i="0">
                 <a:solidFill>
                   <a:srgbClr val="1A1A1A"/>
                 </a:solidFill>
                 <a:latin typeface="Arial"/>
               </a:rPr>
-              <a:t>Each sector after the first costs less — the muscle is built once.</a:t>
+              <a:t>That is not putting paper online. It is changing how the government operates — and it cannot be done by the IT department alone, or the policy side alone.</a:t>
             </a:r>
           </a:p>
         </p:txBody>
       </p:sp>
       <p:sp>
         <p:nvSpPr>
-          <p:cNvPr id="8" name="TextBox 7"/>
-          <p:cNvSpPr txBox="1"/>
-          <p:nvPr/>
-        </p:nvSpPr>
-        <p:spPr>
-          <a:xfrm>
-            <a:off x="658368" y="4663440"/>
-            <a:ext cx="10881360" cy="548640"/>
-          </a:xfrm>
-          <a:prstGeom prst="rect">
-            <a:avLst/>
-          </a:prstGeom>
-          <a:noFill/>
-        </p:spPr>
-        <p:txBody>
-          <a:bodyPr wrap="square">
-            <a:spAutoFit/>
-          </a:bodyPr>
-          <a:lstStyle/>
-          <a:p>
-            <a:r>
-              <a:rPr sz="1550" b="1" i="0">
-                <a:solidFill>
-                  <a:srgbClr val="006E96"/>
-                </a:solidFill>
-                <a:latin typeface="Arial"/>
-              </a:rPr>
-              <a:t>The third is the one that makes it urgent.</a:t>
-            </a:r>
-          </a:p>
-        </p:txBody>
-      </p:sp>
-      <p:sp>
-        <p:nvSpPr>
-          <p:cNvPr id="9" name="TextBox 8"/>
-          <p:cNvSpPr txBox="1"/>
-          <p:nvPr/>
-        </p:nvSpPr>
-        <p:spPr>
-          <a:xfrm>
-            <a:off x="457200" y="6473952"/>
-            <a:ext cx="7772400" cy="292608"/>
-          </a:xfrm>
-          <a:prstGeom prst="rect">
-            <a:avLst/>
-          </a:prstGeom>
-          <a:noFill/>
-        </p:spPr>
-        <p:txBody>
-          <a:bodyPr wrap="square">
-            <a:spAutoFit/>
-          </a:bodyPr>
-          <a:lstStyle/>
-          <a:p>
-            <a:r>
-              <a:rPr sz="900" b="0" i="0">
-                <a:solidFill>
-                  <a:srgbClr val="595959"/>
-                </a:solidFill>
-                <a:latin typeface="Arial"/>
-              </a:rPr>
-              <a:t>5.6 · The closing case — proven, portable, and necessary now</a:t>
-            </a:r>
-          </a:p>
-        </p:txBody>
-      </p:sp>
-    </p:spTree>
-  </p:cSld>
-  <p:clrMapOvr>
-    <a:masterClrMapping/>
-  </p:clrMapOvr>
-</p:sld>
-</file>
-
-<file path=ppt/slides/slide39.xml><?xml version="1.0" encoding="utf-8"?>
-<p:sld xmlns:a="http://schemas.openxmlformats.org/drawingml/2006/main" xmlns:p="http://schemas.openxmlformats.org/presentationml/2006/main" xmlns:r="http://schemas.openxmlformats.org/officeDocument/2006/relationships">
-  <p:cSld>
-    <p:spTree>
-      <p:nvGrpSpPr>
-        <p:cNvPr id="1" name=""/>
-        <p:cNvGrpSpPr/>
-        <p:nvPr/>
-      </p:nvGrpSpPr>
-      <p:grpSpPr/>
-      <p:sp>
-        <p:nvSpPr>
-          <p:cNvPr id="2" name="Rectangle 1"/>
+          <p:cNvPr id="5" name="Rounded Rectangle 4"/>
           <p:cNvSpPr/>
           <p:nvPr/>
         </p:nvSpPr>
         <p:spPr>
           <a:xfrm>
-            <a:off x="457200" y="384048"/>
-            <a:ext cx="45720" cy="256032"/>
-          </a:xfrm>
-          <a:prstGeom prst="rect">
-            <a:avLst/>
+            <a:off x="658368" y="3977639"/>
+            <a:ext cx="10881360" cy="1325880"/>
+          </a:xfrm>
+          <a:prstGeom prst="roundRect">
+            <a:avLst>
+              <a:gd name="adj" fmla="val 4500"/>
+            </a:avLst>
           </a:prstGeom>
           <a:solidFill>
             <a:srgbClr val="009CD6"/>
@@ -12943,14 +12556,14 @@
       </p:sp>
       <p:sp>
         <p:nvSpPr>
-          <p:cNvPr id="3" name="TextBox 2"/>
+          <p:cNvPr id="6" name="TextBox 5"/>
           <p:cNvSpPr txBox="1"/>
           <p:nvPr/>
         </p:nvSpPr>
         <p:spPr>
           <a:xfrm>
-            <a:off x="621792" y="274320"/>
-            <a:ext cx="11247120" cy="914400"/>
+            <a:off x="859536" y="4169663"/>
+            <a:ext cx="10479024" cy="1051560"/>
           </a:xfrm>
           <a:prstGeom prst="rect">
             <a:avLst/>
@@ -12963,28 +12576,33 @@
           </a:bodyPr>
           <a:lstStyle/>
           <a:p>
-            <a:r>
-              <a:rPr sz="2800" b="1" i="0">
+            <a:pPr>
+              <a:spcAft>
+                <a:spcPts val="700"/>
+              </a:spcAft>
+            </a:pPr>
+            <a:r>
+              <a:rPr sz="2300" b="1" i="0">
                 <a:solidFill>
-                  <a:srgbClr val="1A1A1A"/>
+                  <a:srgbClr val="FFFFFF"/>
                 </a:solidFill>
                 <a:latin typeface="Arial"/>
               </a:rPr>
-              <a:t>For thirty years, digital government meant putting paper online. That era is ending</a:t>
+              <a:t>Useful then. Necessary now.</a:t>
             </a:r>
           </a:p>
         </p:txBody>
       </p:sp>
       <p:sp>
         <p:nvSpPr>
-          <p:cNvPr id="4" name="TextBox 3"/>
+          <p:cNvPr id="7" name="TextBox 6"/>
           <p:cNvSpPr txBox="1"/>
           <p:nvPr/>
         </p:nvSpPr>
         <p:spPr>
           <a:xfrm>
-            <a:off x="658368" y="1600200"/>
-            <a:ext cx="10881360" cy="2194560"/>
+            <a:off x="457200" y="6473952"/>
+            <a:ext cx="7772400" cy="292608"/>
           </a:xfrm>
           <a:prstGeom prst="rect">
             <a:avLst/>
@@ -12997,54 +12615,49 @@
           </a:bodyPr>
           <a:lstStyle/>
           <a:p>
-            <a:pPr>
-              <a:spcAft>
-                <a:spcPts val="1200"/>
-              </a:spcAft>
-            </a:pPr>
-            <a:r>
-              <a:rPr sz="2000" b="0" i="0">
+            <a:r>
+              <a:rPr sz="900" b="0" i="0">
                 <a:solidFill>
-                  <a:srgbClr val="1A1A1A"/>
+                  <a:srgbClr val="595959"/>
                 </a:solidFill>
                 <a:latin typeface="Arial"/>
               </a:rPr>
-              <a:t>The form became a web form, the queue an appointment. The work that delivers today is different: once-only data sharing, a shared identity, a single record that follows a person across services.</a:t>
-            </a:r>
-          </a:p>
-          <a:p>
-            <a:pPr>
-              <a:spcAft>
-                <a:spcPts val="1200"/>
-              </a:spcAft>
-            </a:pPr>
-            <a:r>
-              <a:rPr sz="2000" b="0" i="0">
-                <a:solidFill>
-                  <a:srgbClr val="1A1A1A"/>
-                </a:solidFill>
-                <a:latin typeface="Arial"/>
-              </a:rPr>
-              <a:t>That is not putting paper online. It is changing how the government operates — and it cannot be done by the IT department alone, or the policy side alone.</a:t>
+              <a:t>5.6 · The closing case — proven, portable, and necessary now</a:t>
             </a:r>
           </a:p>
         </p:txBody>
       </p:sp>
-      <p:sp>
-        <p:nvSpPr>
-          <p:cNvPr id="5" name="Rounded Rectangle 4"/>
+    </p:spTree>
+  </p:cSld>
+  <p:clrMapOvr>
+    <a:masterClrMapping/>
+  </p:clrMapOvr>
+</p:sld>
+</file>
+
+<file path=ppt/slides/slide46.xml><?xml version="1.0" encoding="utf-8"?>
+<p:sld xmlns:a="http://schemas.openxmlformats.org/drawingml/2006/main" xmlns:p="http://schemas.openxmlformats.org/presentationml/2006/main" xmlns:r="http://schemas.openxmlformats.org/officeDocument/2006/relationships">
+  <p:cSld>
+    <p:spTree>
+      <p:nvGrpSpPr>
+        <p:cNvPr id="1" name=""/>
+        <p:cNvGrpSpPr/>
+        <p:nvPr/>
+      </p:nvGrpSpPr>
+      <p:grpSpPr/>
+      <p:sp>
+        <p:nvSpPr>
+          <p:cNvPr id="2" name="Rectangle 1"/>
           <p:cNvSpPr/>
           <p:nvPr/>
         </p:nvSpPr>
         <p:spPr>
           <a:xfrm>
-            <a:off x="658368" y="3977639"/>
-            <a:ext cx="10881360" cy="1325880"/>
-          </a:xfrm>
-          <a:prstGeom prst="roundRect">
-            <a:avLst>
-              <a:gd name="adj" fmla="val 4500"/>
-            </a:avLst>
+            <a:off x="457200" y="384048"/>
+            <a:ext cx="45720" cy="256032"/>
+          </a:xfrm>
+          <a:prstGeom prst="rect">
+            <a:avLst/>
           </a:prstGeom>
           <a:solidFill>
             <a:srgbClr val="009CD6"/>
@@ -13078,14 +12691,14 @@
       </p:sp>
       <p:sp>
         <p:nvSpPr>
-          <p:cNvPr id="6" name="TextBox 5"/>
+          <p:cNvPr id="3" name="TextBox 2"/>
           <p:cNvSpPr txBox="1"/>
           <p:nvPr/>
         </p:nvSpPr>
         <p:spPr>
           <a:xfrm>
-            <a:off x="859536" y="4169663"/>
-            <a:ext cx="10479024" cy="1051560"/>
+            <a:off x="621792" y="274320"/>
+            <a:ext cx="11247120" cy="914400"/>
           </a:xfrm>
           <a:prstGeom prst="rect">
             <a:avLst/>
@@ -13098,91 +12711,36 @@
           </a:bodyPr>
           <a:lstStyle/>
           <a:p>
-            <a:pPr>
-              <a:spcAft>
-                <a:spcPts val="700"/>
-              </a:spcAft>
-            </a:pPr>
-            <a:r>
-              <a:rPr sz="2300" b="1" i="0">
+            <a:r>
+              <a:rPr sz="2800" b="1" i="0">
                 <a:solidFill>
-                  <a:srgbClr val="FFFFFF"/>
+                  <a:srgbClr val="1A1A1A"/>
                 </a:solidFill>
                 <a:latin typeface="Arial"/>
               </a:rPr>
-              <a:t>Useful then. Necessary now.</a:t>
+              <a:t>The two reasons an Enterprise Architecture exists</a:t>
             </a:r>
           </a:p>
         </p:txBody>
       </p:sp>
       <p:sp>
         <p:nvSpPr>
-          <p:cNvPr id="7" name="TextBox 6"/>
-          <p:cNvSpPr txBox="1"/>
-          <p:nvPr/>
-        </p:nvSpPr>
-        <p:spPr>
-          <a:xfrm>
-            <a:off x="457200" y="6473952"/>
-            <a:ext cx="7772400" cy="292608"/>
-          </a:xfrm>
-          <a:prstGeom prst="rect">
-            <a:avLst/>
-          </a:prstGeom>
-          <a:noFill/>
-        </p:spPr>
-        <p:txBody>
-          <a:bodyPr wrap="square">
-            <a:spAutoFit/>
-          </a:bodyPr>
-          <a:lstStyle/>
-          <a:p>
-            <a:r>
-              <a:rPr sz="900" b="0" i="0">
-                <a:solidFill>
-                  <a:srgbClr val="595959"/>
-                </a:solidFill>
-                <a:latin typeface="Arial"/>
-              </a:rPr>
-              <a:t>5.6 · The closing case — proven, portable, and necessary now</a:t>
-            </a:r>
-          </a:p>
-        </p:txBody>
-      </p:sp>
-    </p:spTree>
-  </p:cSld>
-  <p:clrMapOvr>
-    <a:masterClrMapping/>
-  </p:clrMapOvr>
-</p:sld>
-</file>
-
-<file path=ppt/slides/slide40.xml><?xml version="1.0" encoding="utf-8"?>
-<p:sld xmlns:a="http://schemas.openxmlformats.org/drawingml/2006/main" xmlns:p="http://schemas.openxmlformats.org/presentationml/2006/main" xmlns:r="http://schemas.openxmlformats.org/officeDocument/2006/relationships">
-  <p:cSld>
-    <p:spTree>
-      <p:nvGrpSpPr>
-        <p:cNvPr id="1" name=""/>
-        <p:cNvGrpSpPr/>
-        <p:nvPr/>
-      </p:nvGrpSpPr>
-      <p:grpSpPr/>
-      <p:sp>
-        <p:nvSpPr>
-          <p:cNvPr id="2" name="Rectangle 1"/>
+          <p:cNvPr id="4" name="Rounded Rectangle 3"/>
           <p:cNvSpPr/>
           <p:nvPr/>
         </p:nvSpPr>
         <p:spPr>
           <a:xfrm>
-            <a:off x="457200" y="384048"/>
-            <a:ext cx="45720" cy="256032"/>
-          </a:xfrm>
-          <a:prstGeom prst="rect">
-            <a:avLst/>
+            <a:off x="658368" y="1554480"/>
+            <a:ext cx="5394960" cy="2926080"/>
+          </a:xfrm>
+          <a:prstGeom prst="roundRect">
+            <a:avLst>
+              <a:gd name="adj" fmla="val 4500"/>
+            </a:avLst>
           </a:prstGeom>
           <a:solidFill>
-            <a:srgbClr val="009CD6"/>
+            <a:srgbClr val="E5F5FB"/>
           </a:solidFill>
           <a:ln>
             <a:noFill/>
@@ -13213,14 +12771,14 @@
       </p:sp>
       <p:sp>
         <p:nvSpPr>
-          <p:cNvPr id="3" name="TextBox 2"/>
+          <p:cNvPr id="5" name="TextBox 4"/>
           <p:cNvSpPr txBox="1"/>
           <p:nvPr/>
         </p:nvSpPr>
         <p:spPr>
           <a:xfrm>
-            <a:off x="621792" y="274320"/>
-            <a:ext cx="11247120" cy="914400"/>
+            <a:off x="859536" y="1700784"/>
+            <a:ext cx="4992624" cy="2651760"/>
           </a:xfrm>
           <a:prstGeom prst="rect">
             <a:avLst/>
@@ -13233,27 +12791,80 @@
           </a:bodyPr>
           <a:lstStyle/>
           <a:p>
-            <a:r>
-              <a:rPr sz="2800" b="1" i="0">
+            <a:pPr>
+              <a:spcAft>
+                <a:spcPts val="700"/>
+              </a:spcAft>
+            </a:pPr>
+            <a:r>
+              <a:rPr sz="1900" b="1" i="0">
+                <a:solidFill>
+                  <a:srgbClr val="006E96"/>
+                </a:solidFill>
+                <a:latin typeface="Arial"/>
+              </a:rPr>
+              <a:t>RE-USE</a:t>
+            </a:r>
+          </a:p>
+          <a:p>
+            <a:pPr>
+              <a:spcAft>
+                <a:spcPts val="700"/>
+              </a:spcAft>
+            </a:pPr>
+            <a:r>
+              <a:rPr sz="1600" b="0" i="0">
                 <a:solidFill>
                   <a:srgbClr val="1A1A1A"/>
                 </a:solidFill>
                 <a:latin typeface="Arial"/>
               </a:rPr>
-              <a:t>The two reasons an Enterprise Architecture exists</a:t>
+              <a:t>Inside any project, building your own is cheaper than reusing — so projects fragment.</a:t>
+            </a:r>
+          </a:p>
+          <a:p>
+            <a:pPr>
+              <a:spcAft>
+                <a:spcPts val="700"/>
+              </a:spcAft>
+            </a:pPr>
+            <a:r>
+              <a:rPr sz="1600" b="0" i="0">
+                <a:solidFill>
+                  <a:srgbClr val="1A1A1A"/>
+                </a:solidFill>
+                <a:latin typeface="Arial"/>
+              </a:rPr>
+              <a:t>No procurement rule can change that.</a:t>
+            </a:r>
+          </a:p>
+          <a:p>
+            <a:pPr>
+              <a:spcAft>
+                <a:spcPts val="700"/>
+              </a:spcAft>
+            </a:pPr>
+            <a:r>
+              <a:rPr sz="1600" b="0" i="0">
+                <a:solidFill>
+                  <a:srgbClr val="1A1A1A"/>
+                </a:solidFill>
+                <a:latin typeface="Arial"/>
+              </a:rPr>
+              <a:t>Only whole-of-government planning makes re-use rational, and only an EA gives that view.</a:t>
             </a:r>
           </a:p>
         </p:txBody>
       </p:sp>
       <p:sp>
         <p:nvSpPr>
-          <p:cNvPr id="4" name="Rounded Rectangle 3"/>
+          <p:cNvPr id="6" name="Rounded Rectangle 5"/>
           <p:cNvSpPr/>
           <p:nvPr/>
         </p:nvSpPr>
         <p:spPr>
           <a:xfrm>
-            <a:off x="658368" y="1554480"/>
+            <a:off x="6263640" y="1554480"/>
             <a:ext cx="5394960" cy="2926080"/>
           </a:xfrm>
           <a:prstGeom prst="roundRect">
@@ -13262,7 +12873,7 @@
             </a:avLst>
           </a:prstGeom>
           <a:solidFill>
-            <a:srgbClr val="E5F5FB"/>
+            <a:srgbClr val="F2F2F2"/>
           </a:solidFill>
           <a:ln>
             <a:noFill/>
@@ -13293,139 +12904,6 @@
       </p:sp>
       <p:sp>
         <p:nvSpPr>
-          <p:cNvPr id="5" name="TextBox 4"/>
-          <p:cNvSpPr txBox="1"/>
-          <p:nvPr/>
-        </p:nvSpPr>
-        <p:spPr>
-          <a:xfrm>
-            <a:off x="859536" y="1700784"/>
-            <a:ext cx="4992624" cy="2651760"/>
-          </a:xfrm>
-          <a:prstGeom prst="rect">
-            <a:avLst/>
-          </a:prstGeom>
-          <a:noFill/>
-        </p:spPr>
-        <p:txBody>
-          <a:bodyPr wrap="square">
-            <a:spAutoFit/>
-          </a:bodyPr>
-          <a:lstStyle/>
-          <a:p>
-            <a:pPr>
-              <a:spcAft>
-                <a:spcPts val="700"/>
-              </a:spcAft>
-            </a:pPr>
-            <a:r>
-              <a:rPr sz="1900" b="1" i="0">
-                <a:solidFill>
-                  <a:srgbClr val="006E96"/>
-                </a:solidFill>
-                <a:latin typeface="Arial"/>
-              </a:rPr>
-              <a:t>RE-USE</a:t>
-            </a:r>
-          </a:p>
-          <a:p>
-            <a:pPr>
-              <a:spcAft>
-                <a:spcPts val="700"/>
-              </a:spcAft>
-            </a:pPr>
-            <a:r>
-              <a:rPr sz="1600" b="0" i="0">
-                <a:solidFill>
-                  <a:srgbClr val="1A1A1A"/>
-                </a:solidFill>
-                <a:latin typeface="Arial"/>
-              </a:rPr>
-              <a:t>Inside any project, building your own is cheaper than reusing — so projects fragment.</a:t>
-            </a:r>
-          </a:p>
-          <a:p>
-            <a:pPr>
-              <a:spcAft>
-                <a:spcPts val="700"/>
-              </a:spcAft>
-            </a:pPr>
-            <a:r>
-              <a:rPr sz="1600" b="0" i="0">
-                <a:solidFill>
-                  <a:srgbClr val="1A1A1A"/>
-                </a:solidFill>
-                <a:latin typeface="Arial"/>
-              </a:rPr>
-              <a:t>No procurement rule can change that.</a:t>
-            </a:r>
-          </a:p>
-          <a:p>
-            <a:pPr>
-              <a:spcAft>
-                <a:spcPts val="700"/>
-              </a:spcAft>
-            </a:pPr>
-            <a:r>
-              <a:rPr sz="1600" b="0" i="0">
-                <a:solidFill>
-                  <a:srgbClr val="1A1A1A"/>
-                </a:solidFill>
-                <a:latin typeface="Arial"/>
-              </a:rPr>
-              <a:t>Only whole-of-government planning makes re-use rational, and only an EA gives that view.</a:t>
-            </a:r>
-          </a:p>
-        </p:txBody>
-      </p:sp>
-      <p:sp>
-        <p:nvSpPr>
-          <p:cNvPr id="6" name="Rounded Rectangle 5"/>
-          <p:cNvSpPr/>
-          <p:nvPr/>
-        </p:nvSpPr>
-        <p:spPr>
-          <a:xfrm>
-            <a:off x="6263640" y="1554480"/>
-            <a:ext cx="5394960" cy="2926080"/>
-          </a:xfrm>
-          <a:prstGeom prst="roundRect">
-            <a:avLst>
-              <a:gd name="adj" fmla="val 4500"/>
-            </a:avLst>
-          </a:prstGeom>
-          <a:solidFill>
-            <a:srgbClr val="F2F2F2"/>
-          </a:solidFill>
-          <a:ln>
-            <a:noFill/>
-          </a:ln>
-          <a:effectLst/>
-        </p:spPr>
-        <p:style>
-          <a:lnRef idx="1">
-            <a:schemeClr val="accent1"/>
-          </a:lnRef>
-          <a:fillRef idx="3">
-            <a:schemeClr val="accent1"/>
-          </a:fillRef>
-          <a:effectRef idx="2">
-            <a:schemeClr val="accent1"/>
-          </a:effectRef>
-          <a:fontRef idx="minor">
-            <a:schemeClr val="lt1"/>
-          </a:fontRef>
-        </p:style>
-        <p:txBody>
-          <a:bodyPr rtlCol="0" anchor="ctr"/>
-          <a:lstStyle/>
-          <a:p>
-            <a:pPr algn="ctr"/>
-          </a:p>
-        </p:txBody>
-      </p:sp>
-      <p:sp>
-        <p:nvSpPr>
           <p:cNvPr id="7" name="TextBox 6"/>
           <p:cNvSpPr txBox="1"/>
           <p:nvPr/>
@@ -13587,7 +13065,7 @@
 </p:sld>
 </file>
 
-<file path=ppt/slides/slide41.xml><?xml version="1.0" encoding="utf-8"?>
+<file path=ppt/slides/slide47.xml><?xml version="1.0" encoding="utf-8"?>
 <p:sld xmlns:a="http://schemas.openxmlformats.org/drawingml/2006/main" xmlns:p="http://schemas.openxmlformats.org/presentationml/2006/main" xmlns:r="http://schemas.openxmlformats.org/officeDocument/2006/relationships">
   <p:cSld>
     <p:spTree>
@@ -13830,7 +13308,7 @@
 </p:sld>
 </file>
 
-<file path=ppt/slides/slide42.xml><?xml version="1.0" encoding="utf-8"?>
+<file path=ppt/slides/slide48.xml><?xml version="1.0" encoding="utf-8"?>
 <p:sld xmlns:a="http://schemas.openxmlformats.org/drawingml/2006/main" xmlns:p="http://schemas.openxmlformats.org/presentationml/2006/main" xmlns:r="http://schemas.openxmlformats.org/officeDocument/2006/relationships">
   <p:cSld>
     <p:spTree>

--- a/10-Knowledge-Products/KP1-GEA/videos/module_5/en/decks/KP1_M5_5.6_Deck_v0.2.pptx
+++ b/10-Knowledge-Products/KP1-GEA/videos/module_5/en/decks/KP1_M5_5.6_Deck_v0.2.pptx
@@ -11712,7 +11712,7 @@
                 </a:solidFill>
                 <a:latin typeface="Arial"/>
               </a:rPr>
-              <a:t>~3 minutes · standalone video · voice-over on text slides</a:t>
+              <a:t>standalone video · voice-over on text slides</a:t>
             </a:r>
           </a:p>
         </p:txBody>

--- a/10-Knowledge-Products/KP1-GEA/videos/module_5/en/decks/KP1_M5_5.6_Deck_v0.2.pptx
+++ b/10-Knowledge-Products/KP1-GEA/videos/module_5/en/decks/KP1_M5_5.6_Deck_v0.2.pptx
@@ -11576,7 +11576,7 @@
                 </a:solidFill>
                 <a:latin typeface="Arial"/>
               </a:rPr>
-              <a:t>KP1 · MODULE 5 · VIDEO 5.6</a:t>
+              <a:t>MODULE 5 · VIDEO 5.6</a:t>
             </a:r>
           </a:p>
         </p:txBody>
